--- a/research/poc/PP-04/artifacts/image-roundtrip.pptx
+++ b/research/poc/PP-04/artifacts/image-roundtrip.pptx
@@ -5,7 +5,7 @@
     <p:sldMasterId id="2147483648" r:id="rId1"/>
   </p:sldMasterIdLst>
   <p:sldIdLst>
-    <p:sldId id="256" r:id="R6c3b229a406940b0"/>
+    <p:sldId id="256" r:id="R0f9688ec68784c92"/>
   </p:sldIdLst>
   <p:sldSz cx="9144000" cy="6858000" type="screen4x3"/>
   <p:notesSz cx="6858000" cy="9144000"/>
@@ -3146,7 +3146,7 @@
           <p:nvPr/>
         </p:nvPicPr>
         <p:blipFill>
-          <a:blip xmlns:r="http://schemas.openxmlformats.org/officeDocument/2006/relationships" r:embed="R1d86c0eb3fde42f0"/>
+          <a:blip xmlns:r="http://schemas.openxmlformats.org/officeDocument/2006/relationships" r:embed="R65111f57950241dd"/>
           <a:stretch>
             <a:fillRect/>
           </a:stretch>

--- a/research/poc/PP-04/artifacts/image-roundtrip.pptx
+++ b/research/poc/PP-04/artifacts/image-roundtrip.pptx
@@ -5,7 +5,7 @@
     <p:sldMasterId id="2147483648" r:id="rId1"/>
   </p:sldMasterIdLst>
   <p:sldIdLst>
-    <p:sldId id="256" r:id="R0f9688ec68784c92"/>
+    <p:sldId id="256" r:id="R518e712312fb4a73"/>
   </p:sldIdLst>
   <p:sldSz cx="9144000" cy="6858000" type="screen4x3"/>
   <p:notesSz cx="6858000" cy="9144000"/>
@@ -3146,7 +3146,7 @@
           <p:nvPr/>
         </p:nvPicPr>
         <p:blipFill>
-          <a:blip xmlns:r="http://schemas.openxmlformats.org/officeDocument/2006/relationships" r:embed="R65111f57950241dd"/>
+          <a:blip xmlns:r="http://schemas.openxmlformats.org/officeDocument/2006/relationships" r:embed="R4be347bf06704af7"/>
           <a:stretch>
             <a:fillRect/>
           </a:stretch>
